--- a/diabetes_project/Презентация_Диагностика_диабета.pptx
+++ b/diabetes_project/Презентация_Диагностика_диабета.pptx
@@ -373,7 +373,7 @@
                 </a:solidFill>
                 <a:latin typeface="Arial"/>
               </a:rPr>
-              <a:t>Качество моделей (5-fold CV, F1)</a:t>
+              <a:t>Качество моделей (5-fold CV, Recall)</a:t>
             </a:r>
           </a:p>
         </c:rich>
@@ -397,7 +397,7 @@
               <c:strCache>
                 <c:ptCount val="1"/>
                 <c:pt idx="0">
-                  <c:v>F1 (кросс-валидация)</c:v>
+                  <c:v>Recall (кросс-валидация)</c:v>
                 </c:pt>
               </c:strCache>
             </c:strRef>
@@ -495,13 +495,13 @@
                 <c:formatCode>General</c:formatCode>
                 <c:ptCount val="3"/>
                 <c:pt idx="0">
-                  <c:v>0.673</c:v>
+                  <c:v>0.706</c:v>
                 </c:pt>
                 <c:pt idx="1">
-                  <c:v>0.686</c:v>
+                  <c:v>0.733</c:v>
                 </c:pt>
                 <c:pt idx="2">
-                  <c:v>0.636</c:v>
+                  <c:v>0.608</c:v>
                 </c:pt>
               </c:numCache>
             </c:numRef>
@@ -582,7 +582,7 @@
         <c:axId val="2094734552"/>
         <c:scaling>
           <c:orientation val="minMax"/>
-          <c:max val="0.75"/>
+          <c:max val="0.8"/>
           <c:min val="0.5"/>
         </c:scaling>
         <c:delete val="0"/>
@@ -3667,7 +3667,7 @@
                 <a:ea typeface="Calibri" pitchFamily="34" charset="-122"/>
                 <a:cs typeface="Calibri" pitchFamily="34" charset="-120"/>
               </a:rPr>
-              <a:t>Сравнили три алгоритма с подбором гиперпараметров (GridSearchCV) и стратифицированной кросс-валидацией.</a:t>
+              <a:t>Три алгоритма с подбором гиперпараметров (GridSearchCV); отбор ведётся по Recall на стратифицированной кросс-валидации.</a:t>
             </a:r>
             <a:endParaRPr lang="en-US" sz="1300" dirty="0"/>
           </a:p>
@@ -3688,7 +3688,7 @@
                 <a:ea typeface="Calibri" pitchFamily="34" charset="-122"/>
                 <a:cs typeface="Calibri" pitchFamily="34" charset="-120"/>
               </a:rPr>
-              <a:t>Победитель — Random Forest: лучшее и стабильное качество, устойчив к выбросам, не требует масштабирования.</a:t>
+              <a:t>Победитель — Random Forest (CV-Recall 0.73): лучшее и стабильное качество, устойчив к выбросам.</a:t>
             </a:r>
             <a:endParaRPr lang="en-US" sz="1300" dirty="0"/>
           </a:p>
@@ -6159,7 +6159,7 @@
                 <a:ea typeface="Calibri" pitchFamily="34" charset="-122"/>
                 <a:cs typeface="Calibri" pitchFamily="34" charset="-120"/>
               </a:rPr>
-              <a:t>Поля ввода: 8 показателей пациента (глюкоза, ИМТ, давление…) с единицами измерения и диапазонами.</a:t>
+              <a:t>Поля ввода: 8 показателей пациента с единицами и подсказками с нормами (глюкоза 70–99, ИМТ 18.5–24.9…).</a:t>
             </a:r>
             <a:endParaRPr lang="en-US" sz="1300" dirty="0"/>
           </a:p>
@@ -6204,7 +6204,7 @@
                 <a:ea typeface="Calibri" pitchFamily="34" charset="-122"/>
                 <a:cs typeface="Calibri" pitchFamily="34" charset="-120"/>
               </a:rPr>
-              <a:t>Вкладки: диагностика, вклад признаков (BarPlot), анализ ошибок модели.</a:t>
+              <a:t>Вкладки: диагностика, вклад признаков (BarPlot), матрица ошибок и примеры ошибок модели.</a:t>
             </a:r>
             <a:endParaRPr lang="en-US" sz="1300" dirty="0"/>
           </a:p>

--- a/diabetes_project/Презентация_Диагностика_диабета.pptx
+++ b/diabetes_project/Презентация_Диагностика_диабета.pptx
@@ -4,6 +4,9 @@
   <p:sldMasterIdLst>
     <p:sldMasterId id="2147483648" r:id="rId1"/>
   </p:sldMasterIdLst>
+  <p:notesMasterIdLst>
+    <p:notesMasterId r:id="rId9"/>
+  </p:notesMasterIdLst>
   <p:sldIdLst>
     <p:sldId id="256" r:id="rId2"/>
     <p:sldId id="257" r:id="rId3"/>
@@ -13,9 +16,6 @@
     <p:sldId id="261" r:id="rId7"/>
     <p:sldId id="262" r:id="rId8"/>
   </p:sldIdLst>
-  <p:notesMasterIdLst>
-    <p:notesMasterId r:id="rId9"/>
-  </p:notesMasterIdLst>
   <p:sldSz cx="12192000" cy="6858000"/>
   <p:notesSz cx="6858000" cy="12192000"/>
   <p:defaultTextStyle>
@@ -110,13 +110,20 @@
       </a:defRPr>
     </a:lvl9pPr>
   </p:defaultTextStyle>
+  <p:extLst>
+    <p:ext uri="{EFAFB233-063F-42B5-8137-9DF3F51BA10A}">
+      <p15:sldGuideLst xmlns:p15="http://schemas.microsoft.com/office/powerpoint/2012/main"/>
+    </p:ext>
+  </p:extLst>
 </p:presentation>
 </file>
 
 <file path=ppt/charts/chart1.xml><?xml version="1.0" encoding="utf-8"?>
 <c:chartSpace xmlns:c="http://schemas.openxmlformats.org/drawingml/2006/chart" xmlns:a="http://schemas.openxmlformats.org/drawingml/2006/main" xmlns:r="http://schemas.openxmlformats.org/officeDocument/2006/relationships">
   <c:date1904 val="0"/>
+  <c:lang val="ru-RU"/>
   <c:roundedCorners val="1"/>
+  <c:style val="2"/>
   <c:chart>
     <c:title>
       <c:tx>
@@ -133,7 +140,7 @@
               </a:defRPr>
             </a:pPr>
             <a:r>
-              <a:rPr sz="1300" b="0" i="0" u="none" strike="noStrike">
+              <a:rPr lang="ru-RU" sz="1300" b="0" i="0" u="none" strike="noStrike">
                 <a:solidFill>
                   <a:srgbClr val="16324F"/>
                 </a:solidFill>
@@ -199,80 +206,6 @@
               <a:effectLst/>
             </c:spPr>
           </c:dPt>
-          <c:dLbls>
-            <c:dLbl>
-              <c:idx val="0"/>
-              <c:numFmt formatCode="General" sourceLinked="0"/>
-              <c:spPr/>
-              <c:txPr>
-                <a:bodyPr/>
-                <a:lstStyle/>
-                <a:p>
-                  <a:pPr>
-                    <a:defRPr sz="1200" b="0" i="0" u="none" strike="noStrike">
-                      <a:solidFill>
-                        <a:srgbClr val="FFFFFF"/>
-                      </a:solidFill>
-                      <a:latin typeface="Arial"/>
-                    </a:defRPr>
-                  </a:pPr>
-                </a:p>
-              </c:txPr>
-              <c:showLegendKey val="0"/>
-              <c:showVal val="0"/>
-              <c:showCatName val="0"/>
-              <c:showSerName val="0"/>
-              <c:showPercent val="0"/>
-              <c:showBubbleSize val="0"/>
-            </c:dLbl>
-            <c:dLbl>
-              <c:idx val="1"/>
-              <c:numFmt formatCode="General" sourceLinked="0"/>
-              <c:spPr/>
-              <c:txPr>
-                <a:bodyPr/>
-                <a:lstStyle/>
-                <a:p>
-                  <a:pPr>
-                    <a:defRPr sz="1200" b="0" i="0" u="none" strike="noStrike">
-                      <a:solidFill>
-                        <a:srgbClr val="FFFFFF"/>
-                      </a:solidFill>
-                      <a:latin typeface="Arial"/>
-                    </a:defRPr>
-                  </a:pPr>
-                </a:p>
-              </c:txPr>
-              <c:showLegendKey val="0"/>
-              <c:showVal val="0"/>
-              <c:showCatName val="0"/>
-              <c:showSerName val="0"/>
-              <c:showPercent val="0"/>
-              <c:showBubbleSize val="0"/>
-            </c:dLbl>
-            <c:numFmt formatCode="General" sourceLinked="0"/>
-            <c:txPr>
-              <a:bodyPr/>
-              <a:lstStyle/>
-              <a:p>
-                <a:pPr>
-                  <a:defRPr sz="1800" b="0" i="0" u="none" strike="noStrike">
-                    <a:solidFill>
-                      <a:srgbClr val="000000"/>
-                    </a:solidFill>
-                    <a:latin typeface="Arial"/>
-                  </a:defRPr>
-                </a:pPr>
-              </a:p>
-            </c:txPr>
-            <c:showLegendKey val="0"/>
-            <c:showVal val="0"/>
-            <c:showCatName val="1"/>
-            <c:showSerName val="0"/>
-            <c:showPercent val="1"/>
-            <c:showBubbleSize val="0"/>
-            <c:showLeaderLines val="0"/>
-          </c:dLbls>
           <c:cat>
             <c:strRef>
               <c:f>Sheet1!$A$2:$A$3</c:f>
@@ -291,6 +224,7 @@
             <c:numRef>
               <c:f>Sheet1!$B$2:$B$3</c:f>
               <c:numCache>
+                <c:formatCode>General</c:formatCode>
                 <c:ptCount val="2"/>
                 <c:pt idx="0">
                   <c:v>500</c:v>
@@ -302,6 +236,15 @@
             </c:numRef>
           </c:val>
         </c:ser>
+        <c:dLbls>
+          <c:showLegendKey val="0"/>
+          <c:showVal val="0"/>
+          <c:showCatName val="0"/>
+          <c:showSerName val="0"/>
+          <c:showPercent val="0"/>
+          <c:showBubbleSize val="0"/>
+          <c:showLeaderLines val="0"/>
+        </c:dLbls>
         <c:firstSliceAng val="0"/>
         <c:holeSize val="60"/>
       </c:doughnutChart>
@@ -315,6 +258,7 @@
     </c:plotArea>
     <c:legend>
       <c:legendPos val="b"/>
+      <c:layout/>
       <c:overlay val="0"/>
       <c:txPr>
         <a:bodyPr/>
@@ -327,12 +271,13 @@
               </a:solidFill>
             </a:defRPr>
           </a:pPr>
-          <a:endParaRPr lang="en-US"/>
+          <a:endParaRPr lang="ru-RU"/>
         </a:p>
       </c:txPr>
     </c:legend>
     <c:plotVisOnly val="1"/>
     <c:dispBlanksAs val="span"/>
+    <c:showDLblsOverMax val="1"/>
   </c:chart>
   <c:spPr>
     <a:noFill/>
@@ -350,7 +295,9 @@
 <file path=ppt/charts/chart2.xml><?xml version="1.0" encoding="utf-8"?>
 <c:chartSpace xmlns:c="http://schemas.openxmlformats.org/drawingml/2006/chart" xmlns:a="http://schemas.openxmlformats.org/drawingml/2006/main" xmlns:r="http://schemas.openxmlformats.org/officeDocument/2006/relationships">
   <c:date1904 val="0"/>
+  <c:lang val="ru-RU"/>
   <c:roundedCorners val="1"/>
+  <c:style val="2"/>
   <c:chart>
     <c:title>
       <c:tx>
@@ -367,7 +314,7 @@
               </a:defRPr>
             </a:pPr>
             <a:r>
-              <a:rPr sz="1300" b="0" i="0" u="none" strike="noStrike">
+              <a:rPr lang="ru-RU" sz="1300" b="0" i="0" u="none" strike="noStrike">
                 <a:solidFill>
                   <a:srgbClr val="16324F"/>
                 </a:solidFill>
@@ -409,40 +356,10 @@
             <a:effectLst/>
           </c:spPr>
           <c:invertIfNegative val="0"/>
-          <c:dLbls>
-            <c:numFmt formatCode="0.000" sourceLinked="0"/>
-            <c:txPr>
-              <a:bodyPr/>
-              <a:lstStyle/>
-              <a:p>
-                <a:pPr>
-                  <a:defRPr b="0" i="0" strike="noStrike" sz="1200" u="none">
-                    <a:solidFill>
-                      <a:srgbClr val="1E293B"/>
-                    </a:solidFill>
-                    <a:latin typeface="Arial"/>
-                  </a:defRPr>
-                </a:pPr>
-              </a:p>
-            </c:txPr>
-            <c:showLegendKey val="0"/>
-            <c:showVal val="1"/>
-            <c:showCatName val="0"/>
-            <c:showSerName val="0"/>
-            <c:showPercent val="0"/>
-            <c:showBubbleSize val="0"/>
-            <c:showLeaderLines val="0"/>
-          </c:dLbls>
           <c:dPt>
             <c:idx val="0"/>
             <c:invertIfNegative val="0"/>
             <c:bubble3D val="0"/>
-            <c:spPr>
-              <a:solidFill>
-                <a:srgbClr val="00A896"/>
-              </a:solidFill>
-              <a:effectLst/>
-            </c:spPr>
           </c:dPt>
           <c:dPt>
             <c:idx val="1"/>
@@ -466,27 +383,63 @@
               <a:effectLst/>
             </c:spPr>
           </c:dPt>
+          <c:dLbls>
+            <c:numFmt formatCode="0.000" sourceLinked="0"/>
+            <c:spPr>
+              <a:noFill/>
+              <a:ln>
+                <a:noFill/>
+              </a:ln>
+              <a:effectLst/>
+            </c:spPr>
+            <c:txPr>
+              <a:bodyPr/>
+              <a:lstStyle/>
+              <a:p>
+                <a:pPr>
+                  <a:defRPr sz="1200" b="0" i="0" u="none" strike="noStrike">
+                    <a:solidFill>
+                      <a:srgbClr val="1E293B"/>
+                    </a:solidFill>
+                    <a:latin typeface="Arial"/>
+                  </a:defRPr>
+                </a:pPr>
+                <a:endParaRPr lang="ru-RU"/>
+              </a:p>
+            </c:txPr>
+            <c:showLegendKey val="0"/>
+            <c:showVal val="1"/>
+            <c:showCatName val="0"/>
+            <c:showSerName val="0"/>
+            <c:showPercent val="0"/>
+            <c:showBubbleSize val="0"/>
+            <c:showLeaderLines val="0"/>
+            <c:extLst>
+              <c:ext xmlns:c15="http://schemas.microsoft.com/office/drawing/2012/chart" uri="{CE6537A1-D6FC-4f65-9D91-7224C49458BB}">
+                <c15:layout/>
+                <c15:showLeaderLines val="0"/>
+              </c:ext>
+            </c:extLst>
+          </c:dLbls>
           <c:cat>
-            <c:multiLvlStrRef>
+            <c:strRef>
               <c:f>Sheet1!$A$2:$A$4</c:f>
-              <c:multiLvlStrCache>
+              <c:strCache>
                 <c:ptCount val="3"/>
-                <c:lvl>
-                  <c:pt idx="0">
-                    <c:v>Logistic
+                <c:pt idx="0">
+                  <c:v>Logistic
 Regression</c:v>
-                  </c:pt>
-                  <c:pt idx="1">
-                    <c:v>Random
+                </c:pt>
+                <c:pt idx="1">
+                  <c:v>Random
 Forest</c:v>
-                  </c:pt>
-                  <c:pt idx="2">
-                    <c:v>Gradient
+                </c:pt>
+                <c:pt idx="2">
+                  <c:v>Gradient
 Boosting</c:v>
-                  </c:pt>
-                </c:lvl>
-              </c:multiLvlStrCache>
-            </c:multiLvlStrRef>
+                </c:pt>
+              </c:strCache>
+            </c:strRef>
           </c:cat>
           <c:val>
             <c:numRef>
@@ -495,50 +448,32 @@
                 <c:formatCode>General</c:formatCode>
                 <c:ptCount val="3"/>
                 <c:pt idx="0">
-                  <c:v>0.706</c:v>
+                  <c:v>0.70599999999999996</c:v>
                 </c:pt>
                 <c:pt idx="1">
-                  <c:v>0.733</c:v>
+                  <c:v>0.73299999999999998</c:v>
                 </c:pt>
                 <c:pt idx="2">
-                  <c:v>0.608</c:v>
+                  <c:v>0.60799999999999998</c:v>
                 </c:pt>
               </c:numCache>
             </c:numRef>
           </c:val>
         </c:ser>
         <c:dLbls>
-          <c:numFmt formatCode="0.000" sourceLinked="0"/>
-          <c:txPr>
-            <a:bodyPr/>
-            <a:lstStyle/>
-            <a:p>
-              <a:pPr>
-                <a:defRPr b="0" i="0" strike="noStrike" sz="1200" u="none">
-                  <a:solidFill>
-                    <a:srgbClr val="1E293B"/>
-                  </a:solidFill>
-                  <a:latin typeface="Arial"/>
-                </a:defRPr>
-              </a:pPr>
-            </a:p>
-          </c:txPr>
           <c:showLegendKey val="0"/>
           <c:showVal val="1"/>
           <c:showCatName val="0"/>
           <c:showSerName val="0"/>
           <c:showPercent val="0"/>
           <c:showBubbleSize val="0"/>
-          <c:showLeaderLines val="0"/>
         </c:dLbls>
         <c:gapWidth val="150"/>
-        <c:overlap val="0"/>
-        <c:axId val="2094734554"/>
-        <c:axId val="2094734552"/>
-        <c:axId val="2094734556"/>
+        <c:axId val="-651490080"/>
+        <c:axId val="-651492256"/>
       </c:barChart>
       <c:catAx>
-        <c:axId val="2094734554"/>
+        <c:axId val="-651490080"/>
         <c:scaling>
           <c:orientation val="minMax"/>
         </c:scaling>
@@ -569,17 +504,18 @@
                 <a:latin typeface="Arial"/>
               </a:defRPr>
             </a:pPr>
-            <a:endParaRPr lang="en-US"/>
+            <a:endParaRPr lang="ru-RU"/>
           </a:p>
         </c:txPr>
-        <c:crossAx val="2094734552"/>
+        <c:crossAx val="-651492256"/>
         <c:crosses val="autoZero"/>
         <c:auto val="1"/>
         <c:lblAlgn val="ctr"/>
+        <c:lblOffset val="100"/>
         <c:noMultiLvlLbl val="1"/>
       </c:catAx>
       <c:valAx>
-        <c:axId val="2094734552"/>
+        <c:axId val="-651492256"/>
         <c:scaling>
           <c:orientation val="minMax"/>
           <c:max val="0.8"/>
@@ -623,10 +559,10 @@
                 <a:latin typeface="Arial"/>
               </a:defRPr>
             </a:pPr>
-            <a:endParaRPr lang="en-US"/>
+            <a:endParaRPr lang="ru-RU"/>
           </a:p>
         </c:txPr>
-        <c:crossAx val="2094734554"/>
+        <c:crossAx val="-651490080"/>
         <c:crosses val="autoZero"/>
         <c:crossBetween val="between"/>
       </c:valAx>
@@ -640,6 +576,7 @@
     </c:plotArea>
     <c:plotVisOnly val="1"/>
     <c:dispBlanksAs val="span"/>
+    <c:showDLblsOverMax val="1"/>
   </c:chart>
   <c:spPr>
     <a:noFill/>
@@ -676,234 +613,10 @@
           <a:chExt cx="0" cy="0"/>
         </a:xfrm>
       </p:grpSpPr>
-      <p:sp>
-        <p:nvSpPr>
-          <p:cNvPr id="2" name="Header Placeholder 1"/>
-          <p:cNvSpPr>
-            <a:spLocks noGrp="1"/>
-          </p:cNvSpPr>
-          <p:nvPr>
-            <p:ph type="hdr" sz="quarter"/>
-          </p:nvPr>
-        </p:nvSpPr>
-        <p:spPr>
-          <a:xfrm>
-            <a:off x="0" y="0"/>
-            <a:ext cx="2971800" cy="458788"/>
-          </a:xfrm>
-          <a:prstGeom prst="rect">
-            <a:avLst/>
-          </a:prstGeom>
-        </p:spPr>
-        <p:txBody>
-          <a:bodyPr vert="horz" lIns="91440" tIns="45720" rIns="91440" bIns="45720" rtlCol="0"/>
-          <a:lstStyle>
-            <a:lvl1pPr algn="l">
-              <a:defRPr sz="1200"/>
-            </a:lvl1pPr>
-          </a:lstStyle>
-          <a:p>
-            <a:endParaRPr lang="en-US"/>
-          </a:p>
-        </p:txBody>
-      </p:sp>
-      <p:sp>
-        <p:nvSpPr>
-          <p:cNvPr id="3" name="Date Placeholder 2"/>
-          <p:cNvSpPr>
-            <a:spLocks noGrp="1"/>
-          </p:cNvSpPr>
-          <p:nvPr>
-            <p:ph type="dt" idx="1"/>
-          </p:nvPr>
-        </p:nvSpPr>
-        <p:spPr>
-          <a:xfrm>
-            <a:off x="3884613" y="0"/>
-            <a:ext cx="2971800" cy="458788"/>
-          </a:xfrm>
-          <a:prstGeom prst="rect">
-            <a:avLst/>
-          </a:prstGeom>
-        </p:spPr>
-        <p:txBody>
-          <a:bodyPr vert="horz" lIns="91440" tIns="45720" rIns="91440" bIns="45720" rtlCol="0"/>
-          <a:lstStyle>
-            <a:lvl1pPr algn="r">
-              <a:defRPr sz="1200"/>
-            </a:lvl1pPr>
-          </a:lstStyle>
-          <a:p>
-            <a:fld id="{5282F153-3F37-0F45-9E97-73ACFA13230C}" type="datetimeFigureOut">
-              <a:rPr lang="en-US"/>
-              <a:t>7/23/19</a:t>
-            </a:fld>
-            <a:endParaRPr lang="en-US"/>
-          </a:p>
-        </p:txBody>
-      </p:sp>
-      <p:sp>
-        <p:nvSpPr>
-          <p:cNvPr id="4" name="Slide Image Placeholder 3"/>
-          <p:cNvSpPr>
-            <a:spLocks noGrp="1" noRot="1" noChangeAspect="1"/>
-          </p:cNvSpPr>
-          <p:nvPr>
-            <p:ph type="sldImg" idx="2"/>
-          </p:nvPr>
-        </p:nvSpPr>
-        <p:spPr>
-          <a:xfrm>
-            <a:off x="685800" y="1143000"/>
-            <a:ext cx="5486400" cy="3086100"/>
-          </a:xfrm>
-          <a:prstGeom prst="rect">
-            <a:avLst/>
-          </a:prstGeom>
-          <a:noFill/>
-          <a:ln w="12700">
-            <a:solidFill>
-              <a:prstClr val="black"/>
-            </a:solidFill>
-          </a:ln>
-        </p:spPr>
-        <p:txBody>
-          <a:bodyPr vert="horz" lIns="91440" tIns="45720" rIns="91440" bIns="45720" rtlCol="0" anchor="ctr"/>
-          <a:lstStyle/>
-          <a:p>
-            <a:endParaRPr lang="en-US"/>
-          </a:p>
-        </p:txBody>
-      </p:sp>
-      <p:sp>
-        <p:nvSpPr>
-          <p:cNvPr id="5" name="Notes Placeholder 4"/>
-          <p:cNvSpPr>
-            <a:spLocks noGrp="1"/>
-          </p:cNvSpPr>
-          <p:nvPr>
-            <p:ph type="body" sz="quarter" idx="3"/>
-          </p:nvPr>
-        </p:nvSpPr>
-        <p:spPr>
-          <a:xfrm>
-            <a:off x="685800" y="4400550"/>
-            <a:ext cx="5486400" cy="3600450"/>
-          </a:xfrm>
-          <a:prstGeom prst="rect">
-            <a:avLst/>
-          </a:prstGeom>
-        </p:spPr>
-        <p:txBody>
-          <a:bodyPr vert="horz" lIns="91440" tIns="45720" rIns="91440" bIns="45720" rtlCol="0"/>
-          <a:lstStyle/>
-          <a:p>
-            <a:pPr lvl="0"/>
-            <a:r>
-              <a:rPr lang="en-US"/>
-              <a:t>Click to edit Master text styles</a:t>
-            </a:r>
-          </a:p>
-          <a:p>
-            <a:pPr lvl="1"/>
-            <a:r>
-              <a:rPr lang="en-US"/>
-              <a:t>Second level</a:t>
-            </a:r>
-          </a:p>
-          <a:p>
-            <a:pPr lvl="2"/>
-            <a:r>
-              <a:rPr lang="en-US"/>
-              <a:t>Third level</a:t>
-            </a:r>
-          </a:p>
-          <a:p>
-            <a:pPr lvl="3"/>
-            <a:r>
-              <a:rPr lang="en-US"/>
-              <a:t>Fourth level</a:t>
-            </a:r>
-          </a:p>
-          <a:p>
-            <a:pPr lvl="4"/>
-            <a:r>
-              <a:rPr lang="en-US"/>
-              <a:t>Fifth level</a:t>
-            </a:r>
-          </a:p>
-        </p:txBody>
-      </p:sp>
-      <p:sp>
-        <p:nvSpPr>
-          <p:cNvPr id="6" name="Footer Placeholder 5"/>
-          <p:cNvSpPr>
-            <a:spLocks noGrp="1"/>
-          </p:cNvSpPr>
-          <p:nvPr>
-            <p:ph type="ftr" sz="quarter" idx="4"/>
-          </p:nvPr>
-        </p:nvSpPr>
-        <p:spPr>
-          <a:xfrm>
-            <a:off x="0" y="8685213"/>
-            <a:ext cx="2971800" cy="458787"/>
-          </a:xfrm>
-          <a:prstGeom prst="rect">
-            <a:avLst/>
-          </a:prstGeom>
-        </p:spPr>
-        <p:txBody>
-          <a:bodyPr vert="horz" lIns="91440" tIns="45720" rIns="91440" bIns="45720" rtlCol="0" anchor="b"/>
-          <a:lstStyle>
-            <a:lvl1pPr algn="l">
-              <a:defRPr sz="1200"/>
-            </a:lvl1pPr>
-          </a:lstStyle>
-          <a:p>
-            <a:endParaRPr lang="en-US"/>
-          </a:p>
-        </p:txBody>
-      </p:sp>
-      <p:sp>
-        <p:nvSpPr>
-          <p:cNvPr id="7" name="Slide Number Placeholder 6"/>
-          <p:cNvSpPr>
-            <a:spLocks noGrp="1"/>
-          </p:cNvSpPr>
-          <p:nvPr>
-            <p:ph type="sldNum" sz="quarter" idx="5"/>
-          </p:nvPr>
-        </p:nvSpPr>
-        <p:spPr>
-          <a:xfrm>
-            <a:off x="3884613" y="8685213"/>
-            <a:ext cx="2971800" cy="458787"/>
-          </a:xfrm>
-          <a:prstGeom prst="rect">
-            <a:avLst/>
-          </a:prstGeom>
-        </p:spPr>
-        <p:txBody>
-          <a:bodyPr vert="horz" lIns="91440" tIns="45720" rIns="91440" bIns="45720" rtlCol="0" anchor="b"/>
-          <a:lstStyle>
-            <a:lvl1pPr algn="r">
-              <a:defRPr sz="1200"/>
-            </a:lvl1pPr>
-          </a:lstStyle>
-          <a:p>
-            <a:fld id="{CE5E9CC1-C706-0F49-92D6-E571CC5EEA8F}" type="slidenum">
-              <a:rPr lang="en-US"/>
-              <a:t>‹#›</a:t>
-            </a:fld>
-            <a:endParaRPr lang="en-US"/>
-          </a:p>
-        </p:txBody>
-      </p:sp>
     </p:spTree>
     <p:extLst>
       <p:ext uri="{BB962C8B-B14F-4D97-AF65-F5344CB8AC3E}">
-        <p14:creationId xmlns:p14="http://schemas.microsoft.com/office/powerpoint/2010/main" val="1024086991"/>
+        <p14:creationId xmlns:p14="http://schemas.microsoft.com/office/powerpoint/2010/main" val="3973397794"/>
       </p:ext>
     </p:extLst>
   </p:cSld>
@@ -1047,10 +760,6 @@
           <a:bodyPr/>
           <a:lstStyle/>
           <a:p>
-            <a:r>
-              <a:rPr lang="en-US" dirty="0"/>
-              <a:t/>
-            </a:r>
             <a:endParaRPr lang="en-US" dirty="0"/>
           </a:p>
         </p:txBody>
@@ -1135,10 +844,6 @@
           <a:bodyPr/>
           <a:lstStyle/>
           <a:p>
-            <a:r>
-              <a:rPr lang="en-US" dirty="0"/>
-              <a:t/>
-            </a:r>
             <a:endParaRPr lang="en-US" dirty="0"/>
           </a:p>
         </p:txBody>
@@ -1223,10 +928,6 @@
           <a:bodyPr/>
           <a:lstStyle/>
           <a:p>
-            <a:r>
-              <a:rPr lang="en-US" dirty="0"/>
-              <a:t/>
-            </a:r>
             <a:endParaRPr lang="en-US" dirty="0"/>
           </a:p>
         </p:txBody>
@@ -1311,10 +1012,6 @@
           <a:bodyPr/>
           <a:lstStyle/>
           <a:p>
-            <a:r>
-              <a:rPr lang="en-US" dirty="0"/>
-              <a:t/>
-            </a:r>
             <a:endParaRPr lang="en-US" dirty="0"/>
           </a:p>
         </p:txBody>
@@ -1399,10 +1096,6 @@
           <a:bodyPr/>
           <a:lstStyle/>
           <a:p>
-            <a:r>
-              <a:rPr lang="en-US" dirty="0"/>
-              <a:t/>
-            </a:r>
             <a:endParaRPr lang="en-US" dirty="0"/>
           </a:p>
         </p:txBody>
@@ -1487,10 +1180,6 @@
           <a:bodyPr/>
           <a:lstStyle/>
           <a:p>
-            <a:r>
-              <a:rPr lang="en-US" dirty="0"/>
-              <a:t/>
-            </a:r>
             <a:endParaRPr lang="en-US" dirty="0"/>
           </a:p>
         </p:txBody>
@@ -1575,10 +1264,6 @@
           <a:bodyPr/>
           <a:lstStyle/>
           <a:p>
-            <a:r>
-              <a:rPr lang="en-US" dirty="0"/>
-              <a:t/>
-            </a:r>
             <a:endParaRPr lang="en-US" dirty="0"/>
           </a:p>
         </p:txBody>
@@ -1652,6 +1337,11 @@
 <file path=ppt/slideMasters/slideMaster1.xml><?xml version="1.0" encoding="utf-8"?>
 <p:sldMaster xmlns:a="http://schemas.openxmlformats.org/drawingml/2006/main" xmlns:r="http://schemas.openxmlformats.org/officeDocument/2006/relationships" xmlns:p="http://schemas.openxmlformats.org/presentationml/2006/main">
   <p:cSld>
+    <p:bg>
+      <p:bgRef idx="1001">
+        <a:schemeClr val="bg1"/>
+      </p:bgRef>
+    </p:bg>
     <p:spTree>
       <p:nvGrpSpPr>
         <p:cNvPr id="1" name=""/>
@@ -1934,6 +1624,7 @@
         <a:solidFill>
           <a:srgbClr val="0B2B33"/>
         </a:solidFill>
+        <a:effectLst/>
       </p:bgPr>
     </p:bg>
     <p:spTree>
@@ -2015,11 +1706,11 @@
           <a:bodyPr wrap="square" lIns="0" tIns="0" rIns="0" bIns="0" rtlCol="0" anchor="ctr"/>
           <a:lstStyle/>
           <a:p>
-            <a:pPr indent="0" marL="0">
-              <a:buNone/>
-            </a:pPr>
-            <a:r>
-              <a:rPr lang="en-US" sz="1400" b="1" spc="300" kern="0" dirty="0">
+            <a:pPr marL="0" indent="0">
+              <a:buNone/>
+            </a:pPr>
+            <a:r>
+              <a:rPr lang="en-US" sz="1400" b="1" kern="0" spc="300" dirty="0">
                 <a:solidFill>
                   <a:srgbClr val="00A896"/>
                 </a:solidFill>
@@ -2054,7 +1745,7 @@
           <a:bodyPr wrap="square" lIns="0" tIns="0" rIns="0" bIns="0" rtlCol="0" anchor="ctr"/>
           <a:lstStyle/>
           <a:p>
-            <a:pPr indent="0" marL="0">
+            <a:pPr marL="0" indent="0">
               <a:lnSpc>
                 <a:spcPts val="5200"/>
               </a:lnSpc>
@@ -2074,7 +1765,7 @@
             <a:endParaRPr lang="en-US" sz="5200" dirty="0"/>
           </a:p>
           <a:p>
-            <a:pPr indent="0" marL="0">
+            <a:pPr marL="0" indent="0">
               <a:lnSpc>
                 <a:spcPts val="5200"/>
               </a:lnSpc>
@@ -2116,7 +1807,7 @@
           <a:bodyPr wrap="square" lIns="0" tIns="0" rIns="0" bIns="0" rtlCol="0" anchor="ctr"/>
           <a:lstStyle/>
           <a:p>
-            <a:pPr indent="0" marL="0">
+            <a:pPr marL="0" indent="0">
               <a:buNone/>
             </a:pPr>
             <a:r>
@@ -2178,7 +1869,7 @@
           <a:bodyPr wrap="square" lIns="0" tIns="0" rIns="0" bIns="0" rtlCol="0" anchor="ctr"/>
           <a:lstStyle/>
           <a:p>
-            <a:pPr indent="0" marL="0">
+            <a:pPr marL="0" indent="0">
               <a:buNone/>
             </a:pPr>
             <a:r>
@@ -2192,9 +1883,6 @@
               </a:rPr>
               <a:t>Команда:  </a:t>
             </a:r>
-            <a:pPr indent="0" marL="0">
-              <a:buNone/>
-            </a:pPr>
             <a:r>
               <a:rPr lang="en-US" sz="1600" dirty="0">
                 <a:solidFill>
@@ -2231,7 +1919,7 @@
           <a:bodyPr wrap="square" lIns="0" tIns="0" rIns="0" bIns="0" rtlCol="0" anchor="ctr"/>
           <a:lstStyle/>
           <a:p>
-            <a:pPr indent="0" marL="0">
+            <a:pPr marL="0" indent="0">
               <a:buNone/>
             </a:pPr>
             <a:r>
@@ -2245,9 +1933,6 @@
               </a:rPr>
               <a:t>Группа:  </a:t>
             </a:r>
-            <a:pPr indent="0" marL="0">
-              <a:buNone/>
-            </a:pPr>
             <a:r>
               <a:rPr lang="en-US" sz="1600" dirty="0">
                 <a:solidFill>
@@ -2259,9 +1944,6 @@
               </a:rPr>
               <a:t>ИТ 15-16</a:t>
             </a:r>
-            <a:pPr indent="0" marL="0">
-              <a:buNone/>
-            </a:pPr>
             <a:r>
               <a:rPr lang="en-US" sz="1600" b="1" dirty="0">
                 <a:solidFill>
@@ -2273,9 +1955,6 @@
               </a:rPr>
               <a:t>      Датасет:  </a:t>
             </a:r>
-            <a:pPr indent="0" marL="0">
-              <a:buNone/>
-            </a:pPr>
             <a:r>
               <a:rPr lang="en-US" sz="1600" dirty="0">
                 <a:solidFill>
@@ -2307,6 +1986,7 @@
         <a:solidFill>
           <a:srgbClr val="FFFFFF"/>
         </a:solidFill>
+        <a:effectLst/>
       </p:bgPr>
     </p:bg>
     <p:spTree>
@@ -2344,11 +2024,11 @@
           <a:bodyPr wrap="square" lIns="0" tIns="0" rIns="0" bIns="0" rtlCol="0" anchor="ctr"/>
           <a:lstStyle/>
           <a:p>
-            <a:pPr indent="0" marL="0">
-              <a:buNone/>
-            </a:pPr>
-            <a:r>
-              <a:rPr lang="en-US" sz="1200" b="1" spc="200" kern="0" dirty="0">
+            <a:pPr marL="0" indent="0">
+              <a:buNone/>
+            </a:pPr>
+            <a:r>
+              <a:rPr lang="en-US" sz="1200" b="1" kern="0" spc="200" dirty="0">
                 <a:solidFill>
                   <a:srgbClr val="00A896"/>
                 </a:solidFill>
@@ -2383,7 +2063,7 @@
           <a:bodyPr wrap="square" lIns="0" tIns="0" rIns="0" bIns="0" rtlCol="0" anchor="ctr"/>
           <a:lstStyle/>
           <a:p>
-            <a:pPr indent="0" marL="0">
+            <a:pPr marL="0" indent="0">
               <a:buNone/>
             </a:pPr>
             <a:r>
@@ -2422,7 +2102,7 @@
           </a:solidFill>
           <a:ln/>
           <a:effectLst>
-            <a:outerShdw sx="100000" sy="100000" kx="0" ky="0" algn="bl" rotWithShape="0" blurRad="88900" dist="25400" dir="5400000">
+            <a:outerShdw blurRad="88900" dist="25400" dir="5400000" algn="bl" rotWithShape="0">
               <a:srgbClr val="000000">
                 <a:alpha val="12000"/>
               </a:srgbClr>
@@ -2451,7 +2131,7 @@
           <a:bodyPr wrap="square" lIns="0" tIns="0" rIns="0" bIns="0" rtlCol="0" anchor="ctr"/>
           <a:lstStyle/>
           <a:p>
-            <a:pPr indent="0" marL="0">
+            <a:pPr marL="0" indent="0">
               <a:buNone/>
             </a:pPr>
             <a:r>
@@ -2490,7 +2170,7 @@
           <a:bodyPr wrap="square" lIns="0" tIns="0" rIns="0" bIns="0" rtlCol="0" anchor="ctr"/>
           <a:lstStyle/>
           <a:p>
-            <a:pPr indent="0" marL="0">
+            <a:pPr marL="0" indent="0">
               <a:buNone/>
             </a:pPr>
             <a:r>
@@ -2529,7 +2209,7 @@
           </a:solidFill>
           <a:ln/>
           <a:effectLst>
-            <a:outerShdw sx="100000" sy="100000" kx="0" ky="0" algn="bl" rotWithShape="0" blurRad="88900" dist="25400" dir="5400000">
+            <a:outerShdw blurRad="88900" dist="25400" dir="5400000" algn="bl" rotWithShape="0">
               <a:srgbClr val="000000">
                 <a:alpha val="12000"/>
               </a:srgbClr>
@@ -2558,7 +2238,7 @@
           <a:bodyPr wrap="square" lIns="0" tIns="0" rIns="0" bIns="0" rtlCol="0" anchor="ctr"/>
           <a:lstStyle/>
           <a:p>
-            <a:pPr indent="0" marL="0">
+            <a:pPr marL="0" indent="0">
               <a:buNone/>
             </a:pPr>
             <a:r>
@@ -2597,7 +2277,7 @@
           <a:bodyPr wrap="square" lIns="0" tIns="0" rIns="0" bIns="0" rtlCol="0" anchor="ctr"/>
           <a:lstStyle/>
           <a:p>
-            <a:pPr indent="0" marL="0">
+            <a:pPr marL="0" indent="0">
               <a:buNone/>
             </a:pPr>
             <a:r>
@@ -2636,7 +2316,7 @@
           </a:solidFill>
           <a:ln/>
           <a:effectLst>
-            <a:outerShdw sx="100000" sy="100000" kx="0" ky="0" algn="bl" rotWithShape="0" blurRad="88900" dist="25400" dir="5400000">
+            <a:outerShdw blurRad="88900" dist="25400" dir="5400000" algn="bl" rotWithShape="0">
               <a:srgbClr val="000000">
                 <a:alpha val="12000"/>
               </a:srgbClr>
@@ -2665,7 +2345,7 @@
           <a:bodyPr wrap="square" lIns="0" tIns="0" rIns="0" bIns="0" rtlCol="0" anchor="ctr"/>
           <a:lstStyle/>
           <a:p>
-            <a:pPr indent="0" marL="0">
+            <a:pPr marL="0" indent="0">
               <a:buNone/>
             </a:pPr>
             <a:r>
@@ -2704,7 +2384,7 @@
           <a:bodyPr wrap="square" lIns="0" tIns="0" rIns="0" bIns="0" rtlCol="0" anchor="ctr"/>
           <a:lstStyle/>
           <a:p>
-            <a:pPr indent="0" marL="0">
+            <a:pPr marL="0" indent="0">
               <a:buNone/>
             </a:pPr>
             <a:r>
@@ -2743,7 +2423,7 @@
           <a:bodyPr wrap="square" lIns="0" tIns="0" rIns="0" bIns="0" rtlCol="0" anchor="ctr"/>
           <a:lstStyle/>
           <a:p>
-            <a:pPr indent="0" marL="0">
+            <a:pPr marL="0" indent="0">
               <a:buNone/>
             </a:pPr>
             <a:r>
@@ -2873,7 +2553,7 @@
           <a:bodyPr wrap="square" lIns="0" tIns="0" rIns="0" bIns="0" rtlCol="0" anchor="ctr"/>
           <a:lstStyle/>
           <a:p>
-            <a:pPr algn="l" indent="0" marL="0">
+            <a:pPr marL="0" indent="0" algn="l">
               <a:buNone/>
             </a:pPr>
             <a:r>
@@ -2912,7 +2592,7 @@
           <a:bodyPr wrap="square" lIns="0" tIns="0" rIns="0" bIns="0" rtlCol="0" anchor="ctr"/>
           <a:lstStyle/>
           <a:p>
-            <a:pPr algn="r" indent="0" marL="0">
+            <a:pPr marL="0" indent="0" algn="r">
               <a:buNone/>
             </a:pPr>
             <a:r>
@@ -2946,6 +2626,7 @@
         <a:solidFill>
           <a:srgbClr val="FFFFFF"/>
         </a:solidFill>
+        <a:effectLst/>
       </p:bgPr>
     </p:bg>
     <p:spTree>
@@ -2983,11 +2664,11 @@
           <a:bodyPr wrap="square" lIns="0" tIns="0" rIns="0" bIns="0" rtlCol="0" anchor="ctr"/>
           <a:lstStyle/>
           <a:p>
-            <a:pPr indent="0" marL="0">
-              <a:buNone/>
-            </a:pPr>
-            <a:r>
-              <a:rPr lang="en-US" sz="1200" b="1" spc="200" kern="0" dirty="0">
+            <a:pPr marL="0" indent="0">
+              <a:buNone/>
+            </a:pPr>
+            <a:r>
+              <a:rPr lang="en-US" sz="1200" b="1" kern="0" spc="200" dirty="0">
                 <a:solidFill>
                   <a:srgbClr val="00A896"/>
                 </a:solidFill>
@@ -3022,7 +2703,7 @@
           <a:bodyPr wrap="square" lIns="0" tIns="0" rIns="0" bIns="0" rtlCol="0" anchor="ctr"/>
           <a:lstStyle/>
           <a:p>
-            <a:pPr indent="0" marL="0">
+            <a:pPr marL="0" indent="0">
               <a:buNone/>
             </a:pPr>
             <a:r>
@@ -3042,7 +2723,7 @@
       </p:sp>
       <p:graphicFrame>
         <p:nvGraphicFramePr>
-          <p:cNvPr id="4" name="Chart 0" descr=""/>
+          <p:cNvPr id="4" name="Chart 0"/>
           <p:cNvGraphicFramePr/>
           <p:nvPr/>
         </p:nvGraphicFramePr>
@@ -3050,9 +2731,9 @@
           <a:off x="457200" y="1737360"/>
           <a:ext cx="4206240" cy="4023360"/>
         </p:xfrm>
-        <a:graphic xmlns:a="http://schemas.openxmlformats.org/drawingml/2006/main">
+        <a:graphic>
           <a:graphicData uri="http://schemas.openxmlformats.org/drawingml/2006/chart">
-            <c:chart xmlns:c="http://schemas.openxmlformats.org/drawingml/2006/chart" r:id="rId1"/>
+            <c:chart xmlns:c="http://schemas.openxmlformats.org/drawingml/2006/chart" xmlns:r="http://schemas.openxmlformats.org/officeDocument/2006/relationships" r:id="rId3"/>
           </a:graphicData>
         </a:graphic>
       </p:graphicFrame>
@@ -3077,7 +2758,7 @@
           <a:bodyPr wrap="square" lIns="0" tIns="0" rIns="0" bIns="0" rtlCol="0" anchor="ctr"/>
           <a:lstStyle/>
           <a:p>
-            <a:pPr indent="0" marL="0">
+            <a:pPr marL="0" indent="0">
               <a:buNone/>
             </a:pPr>
             <a:r>
@@ -3270,7 +2951,7 @@
           <a:bodyPr wrap="square" lIns="0" tIns="0" rIns="0" bIns="0" rtlCol="0" anchor="ctr"/>
           <a:lstStyle/>
           <a:p>
-            <a:pPr indent="0" marL="0">
+            <a:pPr marL="0" indent="0">
               <a:buNone/>
             </a:pPr>
             <a:r>
@@ -3376,7 +3057,7 @@
           <a:bodyPr wrap="square" lIns="0" tIns="0" rIns="0" bIns="0" rtlCol="0" anchor="ctr"/>
           <a:lstStyle/>
           <a:p>
-            <a:pPr algn="l" indent="0" marL="0">
+            <a:pPr marL="0" indent="0" algn="l">
               <a:buNone/>
             </a:pPr>
             <a:r>
@@ -3415,7 +3096,7 @@
           <a:bodyPr wrap="square" lIns="0" tIns="0" rIns="0" bIns="0" rtlCol="0" anchor="ctr"/>
           <a:lstStyle/>
           <a:p>
-            <a:pPr algn="r" indent="0" marL="0">
+            <a:pPr marL="0" indent="0" algn="r">
               <a:buNone/>
             </a:pPr>
             <a:r>
@@ -3449,6 +3130,7 @@
         <a:solidFill>
           <a:srgbClr val="FFFFFF"/>
         </a:solidFill>
+        <a:effectLst/>
       </p:bgPr>
     </p:bg>
     <p:spTree>
@@ -3486,11 +3168,11 @@
           <a:bodyPr wrap="square" lIns="0" tIns="0" rIns="0" bIns="0" rtlCol="0" anchor="ctr"/>
           <a:lstStyle/>
           <a:p>
-            <a:pPr indent="0" marL="0">
-              <a:buNone/>
-            </a:pPr>
-            <a:r>
-              <a:rPr lang="en-US" sz="1200" b="1" spc="200" kern="0" dirty="0">
+            <a:pPr marL="0" indent="0">
+              <a:buNone/>
+            </a:pPr>
+            <a:r>
+              <a:rPr lang="en-US" sz="1200" b="1" kern="0" spc="200" dirty="0">
                 <a:solidFill>
                   <a:srgbClr val="00A896"/>
                 </a:solidFill>
@@ -3525,7 +3207,7 @@
           <a:bodyPr wrap="square" lIns="0" tIns="0" rIns="0" bIns="0" rtlCol="0" anchor="ctr"/>
           <a:lstStyle/>
           <a:p>
-            <a:pPr indent="0" marL="0">
+            <a:pPr marL="0" indent="0">
               <a:buNone/>
             </a:pPr>
             <a:r>
@@ -3545,7 +3227,7 @@
       </p:sp>
       <p:graphicFrame>
         <p:nvGraphicFramePr>
-          <p:cNvPr id="4" name="Chart 0" descr=""/>
+          <p:cNvPr id="4" name="Chart 0"/>
           <p:cNvGraphicFramePr/>
           <p:nvPr/>
         </p:nvGraphicFramePr>
@@ -3553,9 +3235,9 @@
           <a:off x="457200" y="1783080"/>
           <a:ext cx="5669280" cy="3931920"/>
         </p:xfrm>
-        <a:graphic xmlns:a="http://schemas.openxmlformats.org/drawingml/2006/main">
+        <a:graphic>
           <a:graphicData uri="http://schemas.openxmlformats.org/drawingml/2006/chart">
-            <c:chart xmlns:c="http://schemas.openxmlformats.org/drawingml/2006/chart" r:id="rId1"/>
+            <c:chart xmlns:c="http://schemas.openxmlformats.org/drawingml/2006/chart" xmlns:r="http://schemas.openxmlformats.org/officeDocument/2006/relationships" r:id="rId3"/>
           </a:graphicData>
         </a:graphic>
       </p:graphicFrame>
@@ -3580,7 +3262,7 @@
           </a:solidFill>
           <a:ln/>
           <a:effectLst>
-            <a:outerShdw sx="100000" sy="100000" kx="0" ky="0" algn="bl" rotWithShape="0" blurRad="88900" dist="25400" dir="5400000">
+            <a:outerShdw blurRad="88900" dist="25400" dir="5400000" algn="bl" rotWithShape="0">
               <a:srgbClr val="000000">
                 <a:alpha val="12000"/>
               </a:srgbClr>
@@ -3609,7 +3291,7 @@
           <a:bodyPr wrap="square" lIns="0" tIns="0" rIns="0" bIns="0" rtlCol="0" anchor="ctr"/>
           <a:lstStyle/>
           <a:p>
-            <a:pPr indent="0" marL="0">
+            <a:pPr marL="0" indent="0">
               <a:buNone/>
             </a:pPr>
             <a:r>
@@ -3715,7 +3397,7 @@
           </a:solidFill>
           <a:ln/>
           <a:effectLst>
-            <a:outerShdw sx="100000" sy="100000" kx="0" ky="0" algn="bl" rotWithShape="0" blurRad="88900" dist="25400" dir="5400000">
+            <a:outerShdw blurRad="88900" dist="25400" dir="5400000" algn="bl" rotWithShape="0">
               <a:srgbClr val="000000">
                 <a:alpha val="12000"/>
               </a:srgbClr>
@@ -3744,7 +3426,7 @@
           <a:bodyPr wrap="square" lIns="0" tIns="0" rIns="0" bIns="0" rtlCol="0" anchor="ctr"/>
           <a:lstStyle/>
           <a:p>
-            <a:pPr indent="0" marL="0">
+            <a:pPr marL="0" indent="0">
               <a:buNone/>
             </a:pPr>
             <a:r>
@@ -3783,7 +3465,7 @@
           <a:bodyPr wrap="square" lIns="0" tIns="0" rIns="0" bIns="0" rtlCol="0" anchor="ctr"/>
           <a:lstStyle/>
           <a:p>
-            <a:pPr indent="0" marL="0">
+            <a:pPr marL="0" indent="0">
               <a:lnSpc>
                 <a:spcPct val="105000"/>
               </a:lnSpc>
@@ -3825,7 +3507,7 @@
           <a:bodyPr wrap="square" lIns="0" tIns="0" rIns="0" bIns="0" rtlCol="0" anchor="ctr"/>
           <a:lstStyle/>
           <a:p>
-            <a:pPr algn="l" indent="0" marL="0">
+            <a:pPr marL="0" indent="0" algn="l">
               <a:buNone/>
             </a:pPr>
             <a:r>
@@ -3864,7 +3546,7 @@
           <a:bodyPr wrap="square" lIns="0" tIns="0" rIns="0" bIns="0" rtlCol="0" anchor="ctr"/>
           <a:lstStyle/>
           <a:p>
-            <a:pPr algn="r" indent="0" marL="0">
+            <a:pPr marL="0" indent="0" algn="r">
               <a:buNone/>
             </a:pPr>
             <a:r>
@@ -3898,6 +3580,7 @@
         <a:solidFill>
           <a:srgbClr val="FFFFFF"/>
         </a:solidFill>
+        <a:effectLst/>
       </p:bgPr>
     </p:bg>
     <p:spTree>
@@ -3935,11 +3618,11 @@
           <a:bodyPr wrap="square" lIns="0" tIns="0" rIns="0" bIns="0" rtlCol="0" anchor="ctr"/>
           <a:lstStyle/>
           <a:p>
-            <a:pPr indent="0" marL="0">
-              <a:buNone/>
-            </a:pPr>
-            <a:r>
-              <a:rPr lang="en-US" sz="1200" b="1" spc="200" kern="0" dirty="0">
+            <a:pPr marL="0" indent="0">
+              <a:buNone/>
+            </a:pPr>
+            <a:r>
+              <a:rPr lang="en-US" sz="1200" b="1" kern="0" spc="200" dirty="0">
                 <a:solidFill>
                   <a:srgbClr val="00A896"/>
                 </a:solidFill>
@@ -3974,7 +3657,7 @@
           <a:bodyPr wrap="square" lIns="0" tIns="0" rIns="0" bIns="0" rtlCol="0" anchor="ctr"/>
           <a:lstStyle/>
           <a:p>
-            <a:pPr indent="0" marL="0">
+            <a:pPr marL="0" indent="0">
               <a:buNone/>
             </a:pPr>
             <a:r>
@@ -4013,7 +3696,7 @@
           </a:solidFill>
           <a:ln/>
           <a:effectLst>
-            <a:outerShdw sx="100000" sy="100000" kx="0" ky="0" algn="bl" rotWithShape="0" blurRad="88900" dist="25400" dir="5400000">
+            <a:outerShdw blurRad="88900" dist="25400" dir="5400000" algn="bl" rotWithShape="0">
               <a:srgbClr val="000000">
                 <a:alpha val="12000"/>
               </a:srgbClr>
@@ -4042,7 +3725,7 @@
           <a:bodyPr wrap="square" lIns="0" tIns="0" rIns="0" bIns="0" rtlCol="0" anchor="ctr"/>
           <a:lstStyle/>
           <a:p>
-            <a:pPr algn="ctr" indent="0" marL="0">
+            <a:pPr marL="0" indent="0" algn="ctr">
               <a:buNone/>
             </a:pPr>
             <a:r>
@@ -4081,7 +3764,7 @@
           <a:bodyPr wrap="square" lIns="0" tIns="0" rIns="0" bIns="0" rtlCol="0" anchor="ctr"/>
           <a:lstStyle/>
           <a:p>
-            <a:pPr algn="ctr" indent="0" marL="0">
+            <a:pPr marL="0" indent="0" algn="ctr">
               <a:buNone/>
             </a:pPr>
             <a:r>
@@ -4120,7 +3803,7 @@
           </a:solidFill>
           <a:ln/>
           <a:effectLst>
-            <a:outerShdw sx="100000" sy="100000" kx="0" ky="0" algn="bl" rotWithShape="0" blurRad="88900" dist="25400" dir="5400000">
+            <a:outerShdw blurRad="88900" dist="25400" dir="5400000" algn="bl" rotWithShape="0">
               <a:srgbClr val="000000">
                 <a:alpha val="12000"/>
               </a:srgbClr>
@@ -4149,7 +3832,7 @@
           <a:bodyPr wrap="square" lIns="0" tIns="0" rIns="0" bIns="0" rtlCol="0" anchor="ctr"/>
           <a:lstStyle/>
           <a:p>
-            <a:pPr algn="ctr" indent="0" marL="0">
+            <a:pPr marL="0" indent="0" algn="ctr">
               <a:buNone/>
             </a:pPr>
             <a:r>
@@ -4188,7 +3871,7 @@
           <a:bodyPr wrap="square" lIns="0" tIns="0" rIns="0" bIns="0" rtlCol="0" anchor="ctr"/>
           <a:lstStyle/>
           <a:p>
-            <a:pPr algn="ctr" indent="0" marL="0">
+            <a:pPr marL="0" indent="0" algn="ctr">
               <a:buNone/>
             </a:pPr>
             <a:r>
@@ -4227,7 +3910,7 @@
           </a:solidFill>
           <a:ln/>
           <a:effectLst>
-            <a:outerShdw sx="100000" sy="100000" kx="0" ky="0" algn="bl" rotWithShape="0" blurRad="88900" dist="25400" dir="5400000">
+            <a:outerShdw blurRad="88900" dist="25400" dir="5400000" algn="bl" rotWithShape="0">
               <a:srgbClr val="000000">
                 <a:alpha val="12000"/>
               </a:srgbClr>
@@ -4256,7 +3939,7 @@
           <a:bodyPr wrap="square" lIns="0" tIns="0" rIns="0" bIns="0" rtlCol="0" anchor="ctr"/>
           <a:lstStyle/>
           <a:p>
-            <a:pPr algn="ctr" indent="0" marL="0">
+            <a:pPr marL="0" indent="0" algn="ctr">
               <a:buNone/>
             </a:pPr>
             <a:r>
@@ -4295,7 +3978,7 @@
           <a:bodyPr wrap="square" lIns="0" tIns="0" rIns="0" bIns="0" rtlCol="0" anchor="ctr"/>
           <a:lstStyle/>
           <a:p>
-            <a:pPr algn="ctr" indent="0" marL="0">
+            <a:pPr marL="0" indent="0" algn="ctr">
               <a:buNone/>
             </a:pPr>
             <a:r>
@@ -4334,7 +4017,7 @@
           </a:solidFill>
           <a:ln/>
           <a:effectLst>
-            <a:outerShdw sx="100000" sy="100000" kx="0" ky="0" algn="bl" rotWithShape="0" blurRad="88900" dist="25400" dir="5400000">
+            <a:outerShdw blurRad="88900" dist="25400" dir="5400000" algn="bl" rotWithShape="0">
               <a:srgbClr val="000000">
                 <a:alpha val="12000"/>
               </a:srgbClr>
@@ -4363,7 +4046,7 @@
           <a:bodyPr wrap="square" lIns="0" tIns="0" rIns="0" bIns="0" rtlCol="0" anchor="ctr"/>
           <a:lstStyle/>
           <a:p>
-            <a:pPr algn="ctr" indent="0" marL="0">
+            <a:pPr marL="0" indent="0" algn="ctr">
               <a:buNone/>
             </a:pPr>
             <a:r>
@@ -4402,7 +4085,7 @@
           <a:bodyPr wrap="square" lIns="0" tIns="0" rIns="0" bIns="0" rtlCol="0" anchor="ctr"/>
           <a:lstStyle/>
           <a:p>
-            <a:pPr algn="ctr" indent="0" marL="0">
+            <a:pPr marL="0" indent="0" algn="ctr">
               <a:buNone/>
             </a:pPr>
             <a:r>
@@ -4441,7 +4124,7 @@
           <a:bodyPr wrap="square" lIns="0" tIns="0" rIns="0" bIns="0" rtlCol="0" anchor="ctr"/>
           <a:lstStyle/>
           <a:p>
-            <a:pPr indent="0" marL="0">
+            <a:pPr marL="0" indent="0">
               <a:buNone/>
             </a:pPr>
             <a:r>
@@ -4480,7 +4163,7 @@
           <a:bodyPr wrap="square" lIns="0" tIns="0" rIns="0" bIns="0" rtlCol="0" anchor="ctr"/>
           <a:lstStyle/>
           <a:p>
-            <a:pPr indent="0" marL="0">
+            <a:pPr marL="0" indent="0">
               <a:buNone/>
             </a:pPr>
             <a:r>
@@ -4519,7 +4202,7 @@
           <a:bodyPr wrap="square" lIns="0" tIns="0" rIns="0" bIns="0" rtlCol="0" anchor="ctr"/>
           <a:lstStyle/>
           <a:p>
-            <a:pPr algn="ctr" indent="0" marL="0">
+            <a:pPr marL="0" indent="0" algn="ctr">
               <a:buNone/>
             </a:pPr>
             <a:r>
@@ -4558,7 +4241,7 @@
           <a:bodyPr wrap="square" lIns="0" tIns="0" rIns="0" bIns="0" rtlCol="0" anchor="ctr"/>
           <a:lstStyle/>
           <a:p>
-            <a:pPr algn="ctr" indent="0" marL="0">
+            <a:pPr marL="0" indent="0" algn="ctr">
               <a:buNone/>
             </a:pPr>
             <a:r>
@@ -4597,7 +4280,7 @@
           <a:bodyPr wrap="square" lIns="0" tIns="0" rIns="0" bIns="0" rtlCol="0" anchor="ctr"/>
           <a:lstStyle/>
           <a:p>
-            <a:pPr algn="r" indent="0" marL="0">
+            <a:pPr marL="0" indent="0" algn="r">
               <a:buNone/>
             </a:pPr>
             <a:r>
@@ -4636,7 +4319,7 @@
           <a:bodyPr wrap="square" lIns="0" tIns="0" rIns="0" bIns="0" rtlCol="0" anchor="ctr"/>
           <a:lstStyle/>
           <a:p>
-            <a:pPr algn="r" indent="0" marL="0">
+            <a:pPr marL="0" indent="0" algn="r">
               <a:buNone/>
             </a:pPr>
             <a:r>
@@ -4697,7 +4380,7 @@
           <a:bodyPr wrap="square" lIns="0" tIns="0" rIns="0" bIns="0" rtlCol="0" anchor="ctr"/>
           <a:lstStyle/>
           <a:p>
-            <a:pPr algn="ctr" indent="0" marL="0">
+            <a:pPr marL="0" indent="0" algn="ctr">
               <a:buNone/>
             </a:pPr>
             <a:r>
@@ -4736,7 +4419,7 @@
           <a:bodyPr wrap="square" lIns="0" tIns="0" rIns="0" bIns="0" rtlCol="0" anchor="ctr"/>
           <a:lstStyle/>
           <a:p>
-            <a:pPr algn="ctr" indent="0" marL="0">
+            <a:pPr marL="0" indent="0" algn="ctr">
               <a:buNone/>
             </a:pPr>
             <a:r>
@@ -4797,7 +4480,7 @@
           <a:bodyPr wrap="square" lIns="0" tIns="0" rIns="0" bIns="0" rtlCol="0" anchor="ctr"/>
           <a:lstStyle/>
           <a:p>
-            <a:pPr algn="ctr" indent="0" marL="0">
+            <a:pPr marL="0" indent="0" algn="ctr">
               <a:buNone/>
             </a:pPr>
             <a:r>
@@ -4836,7 +4519,7 @@
           <a:bodyPr wrap="square" lIns="0" tIns="0" rIns="0" bIns="0" rtlCol="0" anchor="ctr"/>
           <a:lstStyle/>
           <a:p>
-            <a:pPr algn="ctr" indent="0" marL="0">
+            <a:pPr marL="0" indent="0" algn="ctr">
               <a:buNone/>
             </a:pPr>
             <a:r>
@@ -4897,7 +4580,7 @@
           <a:bodyPr wrap="square" lIns="0" tIns="0" rIns="0" bIns="0" rtlCol="0" anchor="ctr"/>
           <a:lstStyle/>
           <a:p>
-            <a:pPr algn="ctr" indent="0" marL="0">
+            <a:pPr marL="0" indent="0" algn="ctr">
               <a:buNone/>
             </a:pPr>
             <a:r>
@@ -4936,7 +4619,7 @@
           <a:bodyPr wrap="square" lIns="0" tIns="0" rIns="0" bIns="0" rtlCol="0" anchor="ctr"/>
           <a:lstStyle/>
           <a:p>
-            <a:pPr algn="ctr" indent="0" marL="0">
+            <a:pPr marL="0" indent="0" algn="ctr">
               <a:buNone/>
             </a:pPr>
             <a:r>
@@ -4997,7 +4680,7 @@
           <a:bodyPr wrap="square" lIns="0" tIns="0" rIns="0" bIns="0" rtlCol="0" anchor="ctr"/>
           <a:lstStyle/>
           <a:p>
-            <a:pPr algn="ctr" indent="0" marL="0">
+            <a:pPr marL="0" indent="0" algn="ctr">
               <a:buNone/>
             </a:pPr>
             <a:r>
@@ -5036,7 +4719,7 @@
           <a:bodyPr wrap="square" lIns="0" tIns="0" rIns="0" bIns="0" rtlCol="0" anchor="ctr"/>
           <a:lstStyle/>
           <a:p>
-            <a:pPr algn="ctr" indent="0" marL="0">
+            <a:pPr marL="0" indent="0" algn="ctr">
               <a:buNone/>
             </a:pPr>
             <a:r>
@@ -5075,7 +4758,7 @@
           <a:bodyPr wrap="square" lIns="0" tIns="0" rIns="0" bIns="0" rtlCol="0" anchor="ctr"/>
           <a:lstStyle/>
           <a:p>
-            <a:pPr indent="0" marL="0">
+            <a:pPr marL="0" indent="0">
               <a:buNone/>
             </a:pPr>
             <a:r>
@@ -5205,7 +4888,7 @@
           <a:bodyPr wrap="square" lIns="0" tIns="0" rIns="0" bIns="0" rtlCol="0" anchor="ctr"/>
           <a:lstStyle/>
           <a:p>
-            <a:pPr algn="l" indent="0" marL="0">
+            <a:pPr marL="0" indent="0" algn="l">
               <a:buNone/>
             </a:pPr>
             <a:r>
@@ -5244,7 +4927,7 @@
           <a:bodyPr wrap="square" lIns="0" tIns="0" rIns="0" bIns="0" rtlCol="0" anchor="ctr"/>
           <a:lstStyle/>
           <a:p>
-            <a:pPr algn="r" indent="0" marL="0">
+            <a:pPr marL="0" indent="0" algn="r">
               <a:buNone/>
             </a:pPr>
             <a:r>
@@ -5278,6 +4961,7 @@
         <a:solidFill>
           <a:srgbClr val="FFFFFF"/>
         </a:solidFill>
+        <a:effectLst/>
       </p:bgPr>
     </p:bg>
     <p:spTree>
@@ -5315,11 +4999,11 @@
           <a:bodyPr wrap="square" lIns="0" tIns="0" rIns="0" bIns="0" rtlCol="0" anchor="ctr"/>
           <a:lstStyle/>
           <a:p>
-            <a:pPr indent="0" marL="0">
-              <a:buNone/>
-            </a:pPr>
-            <a:r>
-              <a:rPr lang="en-US" sz="1200" b="1" spc="200" kern="0" dirty="0">
+            <a:pPr marL="0" indent="0">
+              <a:buNone/>
+            </a:pPr>
+            <a:r>
+              <a:rPr lang="en-US" sz="1200" b="1" kern="0" spc="200" dirty="0">
                 <a:solidFill>
                   <a:srgbClr val="00A896"/>
                 </a:solidFill>
@@ -5354,7 +5038,7 @@
           <a:bodyPr wrap="square" lIns="0" tIns="0" rIns="0" bIns="0" rtlCol="0" anchor="ctr"/>
           <a:lstStyle/>
           <a:p>
-            <a:pPr indent="0" marL="0">
+            <a:pPr marL="0" indent="0">
               <a:buNone/>
             </a:pPr>
             <a:r>
@@ -5393,7 +5077,7 @@
           </a:solidFill>
           <a:ln/>
           <a:effectLst>
-            <a:outerShdw sx="100000" sy="100000" kx="0" ky="0" algn="bl" rotWithShape="0" blurRad="88900" dist="25400" dir="5400000">
+            <a:outerShdw blurRad="88900" dist="25400" dir="5400000" algn="bl" rotWithShape="0">
               <a:srgbClr val="000000">
                 <a:alpha val="12000"/>
               </a:srgbClr>
@@ -5422,7 +5106,7 @@
           <a:bodyPr wrap="square" lIns="0" tIns="0" rIns="0" bIns="0" rtlCol="0" anchor="ctr"/>
           <a:lstStyle/>
           <a:p>
-            <a:pPr algn="ctr" indent="0" marL="0">
+            <a:pPr marL="0" indent="0" algn="ctr">
               <a:buNone/>
             </a:pPr>
             <a:r>
@@ -5461,7 +5145,7 @@
           <a:bodyPr wrap="square" lIns="0" tIns="0" rIns="0" bIns="0" rtlCol="0" anchor="ctr"/>
           <a:lstStyle/>
           <a:p>
-            <a:pPr algn="ctr" indent="0" marL="0">
+            <a:pPr marL="0" indent="0" algn="ctr">
               <a:buNone/>
             </a:pPr>
             <a:r>
@@ -5500,7 +5184,7 @@
           <a:bodyPr wrap="square" lIns="0" tIns="0" rIns="0" bIns="0" rtlCol="0" anchor="ctr"/>
           <a:lstStyle/>
           <a:p>
-            <a:pPr algn="ctr" indent="0" marL="0">
+            <a:pPr marL="0" indent="0" algn="ctr">
               <a:buNone/>
             </a:pPr>
             <a:r>
@@ -5536,7 +5220,7 @@
           </a:solidFill>
           <a:ln/>
           <a:effectLst>
-            <a:outerShdw sx="100000" sy="100000" kx="0" ky="0" algn="bl" rotWithShape="0" blurRad="88900" dist="25400" dir="5400000">
+            <a:outerShdw blurRad="88900" dist="25400" dir="5400000" algn="bl" rotWithShape="0">
               <a:srgbClr val="000000">
                 <a:alpha val="12000"/>
               </a:srgbClr>
@@ -5565,7 +5249,7 @@
           <a:bodyPr wrap="square" lIns="0" tIns="0" rIns="0" bIns="0" rtlCol="0" anchor="ctr"/>
           <a:lstStyle/>
           <a:p>
-            <a:pPr algn="ctr" indent="0" marL="0">
+            <a:pPr marL="0" indent="0" algn="ctr">
               <a:buNone/>
             </a:pPr>
             <a:r>
@@ -5604,7 +5288,7 @@
           <a:bodyPr wrap="square" lIns="0" tIns="0" rIns="0" bIns="0" rtlCol="0" anchor="ctr"/>
           <a:lstStyle/>
           <a:p>
-            <a:pPr algn="ctr" indent="0" marL="0">
+            <a:pPr marL="0" indent="0" algn="ctr">
               <a:buNone/>
             </a:pPr>
             <a:r>
@@ -5643,7 +5327,7 @@
           <a:bodyPr wrap="square" lIns="0" tIns="0" rIns="0" bIns="0" rtlCol="0" anchor="ctr"/>
           <a:lstStyle/>
           <a:p>
-            <a:pPr algn="ctr" indent="0" marL="0">
+            <a:pPr marL="0" indent="0" algn="ctr">
               <a:buNone/>
             </a:pPr>
             <a:r>
@@ -5679,7 +5363,7 @@
           </a:solidFill>
           <a:ln/>
           <a:effectLst>
-            <a:outerShdw sx="100000" sy="100000" kx="0" ky="0" algn="bl" rotWithShape="0" blurRad="88900" dist="25400" dir="5400000">
+            <a:outerShdw blurRad="88900" dist="25400" dir="5400000" algn="bl" rotWithShape="0">
               <a:srgbClr val="000000">
                 <a:alpha val="12000"/>
               </a:srgbClr>
@@ -5708,7 +5392,7 @@
           <a:bodyPr wrap="square" lIns="0" tIns="0" rIns="0" bIns="0" rtlCol="0" anchor="ctr"/>
           <a:lstStyle/>
           <a:p>
-            <a:pPr algn="ctr" indent="0" marL="0">
+            <a:pPr marL="0" indent="0" algn="ctr">
               <a:buNone/>
             </a:pPr>
             <a:r>
@@ -5747,7 +5431,7 @@
           <a:bodyPr wrap="square" lIns="0" tIns="0" rIns="0" bIns="0" rtlCol="0" anchor="ctr"/>
           <a:lstStyle/>
           <a:p>
-            <a:pPr algn="ctr" indent="0" marL="0">
+            <a:pPr marL="0" indent="0" algn="ctr">
               <a:buNone/>
             </a:pPr>
             <a:r>
@@ -5786,7 +5470,7 @@
           <a:bodyPr wrap="square" lIns="0" tIns="0" rIns="0" bIns="0" rtlCol="0" anchor="ctr"/>
           <a:lstStyle/>
           <a:p>
-            <a:pPr algn="ctr" indent="0" marL="0">
+            <a:pPr marL="0" indent="0" algn="ctr">
               <a:buNone/>
             </a:pPr>
             <a:r>
@@ -5822,7 +5506,7 @@
           </a:solidFill>
           <a:ln/>
           <a:effectLst>
-            <a:outerShdw sx="100000" sy="100000" kx="0" ky="0" algn="bl" rotWithShape="0" blurRad="88900" dist="25400" dir="5400000">
+            <a:outerShdw blurRad="88900" dist="25400" dir="5400000" algn="bl" rotWithShape="0">
               <a:srgbClr val="000000">
                 <a:alpha val="12000"/>
               </a:srgbClr>
@@ -5851,7 +5535,7 @@
           <a:bodyPr wrap="square" lIns="0" tIns="0" rIns="0" bIns="0" rtlCol="0" anchor="ctr"/>
           <a:lstStyle/>
           <a:p>
-            <a:pPr algn="ctr" indent="0" marL="0">
+            <a:pPr marL="0" indent="0" algn="ctr">
               <a:buNone/>
             </a:pPr>
             <a:r>
@@ -5890,7 +5574,7 @@
           <a:bodyPr wrap="square" lIns="0" tIns="0" rIns="0" bIns="0" rtlCol="0" anchor="ctr"/>
           <a:lstStyle/>
           <a:p>
-            <a:pPr algn="ctr" indent="0" marL="0">
+            <a:pPr marL="0" indent="0" algn="ctr">
               <a:buNone/>
             </a:pPr>
             <a:r>
@@ -5929,7 +5613,7 @@
           <a:bodyPr wrap="square" lIns="0" tIns="0" rIns="0" bIns="0" rtlCol="0" anchor="ctr"/>
           <a:lstStyle/>
           <a:p>
-            <a:pPr algn="ctr" indent="0" marL="0">
+            <a:pPr marL="0" indent="0" algn="ctr">
               <a:buNone/>
             </a:pPr>
             <a:r>
@@ -5965,7 +5649,7 @@
           </a:solidFill>
           <a:ln/>
           <a:effectLst>
-            <a:outerShdw sx="100000" sy="100000" kx="0" ky="0" algn="bl" rotWithShape="0" blurRad="88900" dist="25400" dir="5400000">
+            <a:outerShdw blurRad="88900" dist="25400" dir="5400000" algn="bl" rotWithShape="0">
               <a:srgbClr val="000000">
                 <a:alpha val="12000"/>
               </a:srgbClr>
@@ -5994,7 +5678,7 @@
           <a:bodyPr wrap="square" lIns="0" tIns="0" rIns="0" bIns="0" rtlCol="0" anchor="ctr"/>
           <a:lstStyle/>
           <a:p>
-            <a:pPr algn="ctr" indent="0" marL="0">
+            <a:pPr marL="0" indent="0" algn="ctr">
               <a:buNone/>
             </a:pPr>
             <a:r>
@@ -6033,7 +5717,7 @@
           <a:bodyPr wrap="square" lIns="0" tIns="0" rIns="0" bIns="0" rtlCol="0" anchor="ctr"/>
           <a:lstStyle/>
           <a:p>
-            <a:pPr algn="ctr" indent="0" marL="0">
+            <a:pPr marL="0" indent="0" algn="ctr">
               <a:buNone/>
             </a:pPr>
             <a:r>
@@ -6072,7 +5756,7 @@
           </a:solidFill>
           <a:ln/>
           <a:effectLst>
-            <a:outerShdw sx="100000" sy="100000" kx="0" ky="0" algn="bl" rotWithShape="0" blurRad="88900" dist="25400" dir="5400000">
+            <a:outerShdw blurRad="88900" dist="25400" dir="5400000" algn="bl" rotWithShape="0">
               <a:srgbClr val="000000">
                 <a:alpha val="12000"/>
               </a:srgbClr>
@@ -6101,7 +5785,7 @@
           <a:bodyPr wrap="square" lIns="0" tIns="0" rIns="0" bIns="0" rtlCol="0" anchor="ctr"/>
           <a:lstStyle/>
           <a:p>
-            <a:pPr indent="0" marL="0">
+            <a:pPr marL="0" indent="0">
               <a:buNone/>
             </a:pPr>
             <a:r>
@@ -6231,7 +5915,7 @@
           </a:solidFill>
           <a:ln/>
           <a:effectLst>
-            <a:outerShdw sx="100000" sy="100000" kx="0" ky="0" algn="bl" rotWithShape="0" blurRad="88900" dist="25400" dir="5400000">
+            <a:outerShdw blurRad="88900" dist="25400" dir="5400000" algn="bl" rotWithShape="0">
               <a:srgbClr val="000000">
                 <a:alpha val="12000"/>
               </a:srgbClr>
@@ -6260,7 +5944,7 @@
           <a:bodyPr wrap="square" lIns="0" tIns="0" rIns="0" bIns="0" rtlCol="0" anchor="ctr"/>
           <a:lstStyle/>
           <a:p>
-            <a:pPr indent="0" marL="0">
+            <a:pPr marL="0" indent="0">
               <a:buNone/>
             </a:pPr>
             <a:r>
@@ -6390,7 +6074,7 @@
           <a:bodyPr wrap="square" lIns="0" tIns="0" rIns="0" bIns="0" rtlCol="0" anchor="ctr"/>
           <a:lstStyle/>
           <a:p>
-            <a:pPr algn="l" indent="0" marL="0">
+            <a:pPr marL="0" indent="0" algn="l">
               <a:buNone/>
             </a:pPr>
             <a:r>
@@ -6429,7 +6113,7 @@
           <a:bodyPr wrap="square" lIns="0" tIns="0" rIns="0" bIns="0" rtlCol="0" anchor="ctr"/>
           <a:lstStyle/>
           <a:p>
-            <a:pPr algn="r" indent="0" marL="0">
+            <a:pPr marL="0" indent="0" algn="r">
               <a:buNone/>
             </a:pPr>
             <a:r>
@@ -6463,6 +6147,7 @@
         <a:solidFill>
           <a:srgbClr val="0B2B33"/>
         </a:solidFill>
+        <a:effectLst/>
       </p:bgPr>
     </p:bg>
     <p:spTree>
@@ -6522,11 +6207,11 @@
           <a:bodyPr wrap="square" lIns="0" tIns="0" rIns="0" bIns="0" rtlCol="0" anchor="ctr"/>
           <a:lstStyle/>
           <a:p>
-            <a:pPr indent="0" marL="0">
-              <a:buNone/>
-            </a:pPr>
-            <a:r>
-              <a:rPr lang="en-US" sz="1300" b="1" spc="300" kern="0" dirty="0">
+            <a:pPr marL="0" indent="0">
+              <a:buNone/>
+            </a:pPr>
+            <a:r>
+              <a:rPr lang="en-US" sz="1300" b="1" kern="0" spc="300" dirty="0">
                 <a:solidFill>
                   <a:srgbClr val="00A896"/>
                 </a:solidFill>
@@ -6561,7 +6246,7 @@
           <a:bodyPr wrap="square" lIns="0" tIns="0" rIns="0" bIns="0" rtlCol="0" anchor="ctr"/>
           <a:lstStyle/>
           <a:p>
-            <a:pPr indent="0" marL="0">
+            <a:pPr marL="0" indent="0">
               <a:buNone/>
             </a:pPr>
             <a:r>
@@ -6600,7 +6285,7 @@
           <a:bodyPr wrap="square" lIns="0" tIns="0" rIns="0" bIns="0" rtlCol="0" anchor="ctr"/>
           <a:lstStyle/>
           <a:p>
-            <a:pPr indent="0" marL="0">
+            <a:pPr marL="0" indent="0">
               <a:buNone/>
             </a:pPr>
             <a:r>
@@ -6730,7 +6415,7 @@
           <a:bodyPr wrap="square" lIns="0" tIns="0" rIns="0" bIns="0" rtlCol="0" anchor="ctr"/>
           <a:lstStyle/>
           <a:p>
-            <a:pPr indent="0" marL="0">
+            <a:pPr marL="0" indent="0">
               <a:buNone/>
             </a:pPr>
             <a:r>
@@ -6860,7 +6545,7 @@
           <a:bodyPr wrap="square" lIns="0" tIns="0" rIns="0" bIns="0" rtlCol="0" anchor="ctr"/>
           <a:lstStyle/>
           <a:p>
-            <a:pPr indent="0" marL="0">
+            <a:pPr marL="0" indent="0">
               <a:buNone/>
             </a:pPr>
             <a:r>
@@ -7179,4 +6864,265 @@
     </a:ext>
   </a:extLst>
 </a:theme>
+</file>
+
+<file path=ppt/theme/theme2.xml><?xml version="1.0" encoding="utf-8"?>
+<a:theme xmlns:a="http://schemas.openxmlformats.org/drawingml/2006/main" name="Тема Office">
+  <a:themeElements>
+    <a:clrScheme name="Стандартная">
+      <a:dk1>
+        <a:sysClr val="windowText" lastClr="000000"/>
+      </a:dk1>
+      <a:lt1>
+        <a:sysClr val="window" lastClr="FFFFFF"/>
+      </a:lt1>
+      <a:dk2>
+        <a:srgbClr val="44546A"/>
+      </a:dk2>
+      <a:lt2>
+        <a:srgbClr val="E7E6E6"/>
+      </a:lt2>
+      <a:accent1>
+        <a:srgbClr val="5B9BD5"/>
+      </a:accent1>
+      <a:accent2>
+        <a:srgbClr val="ED7D31"/>
+      </a:accent2>
+      <a:accent3>
+        <a:srgbClr val="A5A5A5"/>
+      </a:accent3>
+      <a:accent4>
+        <a:srgbClr val="FFC000"/>
+      </a:accent4>
+      <a:accent5>
+        <a:srgbClr val="4472C4"/>
+      </a:accent5>
+      <a:accent6>
+        <a:srgbClr val="70AD47"/>
+      </a:accent6>
+      <a:hlink>
+        <a:srgbClr val="0563C1"/>
+      </a:hlink>
+      <a:folHlink>
+        <a:srgbClr val="954F72"/>
+      </a:folHlink>
+    </a:clrScheme>
+    <a:fontScheme name="Стандартная">
+      <a:majorFont>
+        <a:latin typeface="Calibri Light" panose="020F0302020204030204"/>
+        <a:ea typeface=""/>
+        <a:cs typeface=""/>
+        <a:font script="Jpan" typeface="ＭＳ Ｐゴシック"/>
+        <a:font script="Hang" typeface="맑은 고딕"/>
+        <a:font script="Hans" typeface="宋体"/>
+        <a:font script="Hant" typeface="新細明體"/>
+        <a:font script="Arab" typeface="Times New Roman"/>
+        <a:font script="Hebr" typeface="Times New Roman"/>
+        <a:font script="Thai" typeface="Angsana New"/>
+        <a:font script="Ethi" typeface="Nyala"/>
+        <a:font script="Beng" typeface="Vrinda"/>
+        <a:font script="Gujr" typeface="Shruti"/>
+        <a:font script="Khmr" typeface="MoolBoran"/>
+        <a:font script="Knda" typeface="Tunga"/>
+        <a:font script="Guru" typeface="Raavi"/>
+        <a:font script="Cans" typeface="Euphemia"/>
+        <a:font script="Cher" typeface="Plantagenet Cherokee"/>
+        <a:font script="Yiii" typeface="Microsoft Yi Baiti"/>
+        <a:font script="Tibt" typeface="Microsoft Himalaya"/>
+        <a:font script="Thaa" typeface="MV Boli"/>
+        <a:font script="Deva" typeface="Mangal"/>
+        <a:font script="Telu" typeface="Gautami"/>
+        <a:font script="Taml" typeface="Latha"/>
+        <a:font script="Syrc" typeface="Estrangelo Edessa"/>
+        <a:font script="Orya" typeface="Kalinga"/>
+        <a:font script="Mlym" typeface="Kartika"/>
+        <a:font script="Laoo" typeface="DokChampa"/>
+        <a:font script="Sinh" typeface="Iskoola Pota"/>
+        <a:font script="Mong" typeface="Mongolian Baiti"/>
+        <a:font script="Viet" typeface="Times New Roman"/>
+        <a:font script="Uigh" typeface="Microsoft Uighur"/>
+        <a:font script="Geor" typeface="Sylfaen"/>
+      </a:majorFont>
+      <a:minorFont>
+        <a:latin typeface="Calibri" panose="020F0502020204030204"/>
+        <a:ea typeface=""/>
+        <a:cs typeface=""/>
+        <a:font script="Jpan" typeface="ＭＳ Ｐゴシック"/>
+        <a:font script="Hang" typeface="맑은 고딕"/>
+        <a:font script="Hans" typeface="宋体"/>
+        <a:font script="Hant" typeface="新細明體"/>
+        <a:font script="Arab" typeface="Arial"/>
+        <a:font script="Hebr" typeface="Arial"/>
+        <a:font script="Thai" typeface="Cordia New"/>
+        <a:font script="Ethi" typeface="Nyala"/>
+        <a:font script="Beng" typeface="Vrinda"/>
+        <a:font script="Gujr" typeface="Shruti"/>
+        <a:font script="Khmr" typeface="DaunPenh"/>
+        <a:font script="Knda" typeface="Tunga"/>
+        <a:font script="Guru" typeface="Raavi"/>
+        <a:font script="Cans" typeface="Euphemia"/>
+        <a:font script="Cher" typeface="Plantagenet Cherokee"/>
+        <a:font script="Yiii" typeface="Microsoft Yi Baiti"/>
+        <a:font script="Tibt" typeface="Microsoft Himalaya"/>
+        <a:font script="Thaa" typeface="MV Boli"/>
+        <a:font script="Deva" typeface="Mangal"/>
+        <a:font script="Telu" typeface="Gautami"/>
+        <a:font script="Taml" typeface="Latha"/>
+        <a:font script="Syrc" typeface="Estrangelo Edessa"/>
+        <a:font script="Orya" typeface="Kalinga"/>
+        <a:font script="Mlym" typeface="Kartika"/>
+        <a:font script="Laoo" typeface="DokChampa"/>
+        <a:font script="Sinh" typeface="Iskoola Pota"/>
+        <a:font script="Mong" typeface="Mongolian Baiti"/>
+        <a:font script="Viet" typeface="Arial"/>
+        <a:font script="Uigh" typeface="Microsoft Uighur"/>
+        <a:font script="Geor" typeface="Sylfaen"/>
+      </a:minorFont>
+    </a:fontScheme>
+    <a:fmtScheme name="Стандартная">
+      <a:fillStyleLst>
+        <a:solidFill>
+          <a:schemeClr val="phClr"/>
+        </a:solidFill>
+        <a:gradFill rotWithShape="1">
+          <a:gsLst>
+            <a:gs pos="0">
+              <a:schemeClr val="phClr">
+                <a:lumMod val="110000"/>
+                <a:satMod val="105000"/>
+                <a:tint val="67000"/>
+              </a:schemeClr>
+            </a:gs>
+            <a:gs pos="50000">
+              <a:schemeClr val="phClr">
+                <a:lumMod val="105000"/>
+                <a:satMod val="103000"/>
+                <a:tint val="73000"/>
+              </a:schemeClr>
+            </a:gs>
+            <a:gs pos="100000">
+              <a:schemeClr val="phClr">
+                <a:lumMod val="105000"/>
+                <a:satMod val="109000"/>
+                <a:tint val="81000"/>
+              </a:schemeClr>
+            </a:gs>
+          </a:gsLst>
+          <a:lin ang="5400000" scaled="0"/>
+        </a:gradFill>
+        <a:gradFill rotWithShape="1">
+          <a:gsLst>
+            <a:gs pos="0">
+              <a:schemeClr val="phClr">
+                <a:satMod val="103000"/>
+                <a:lumMod val="102000"/>
+                <a:tint val="94000"/>
+              </a:schemeClr>
+            </a:gs>
+            <a:gs pos="50000">
+              <a:schemeClr val="phClr">
+                <a:satMod val="110000"/>
+                <a:lumMod val="100000"/>
+                <a:shade val="100000"/>
+              </a:schemeClr>
+            </a:gs>
+            <a:gs pos="100000">
+              <a:schemeClr val="phClr">
+                <a:lumMod val="99000"/>
+                <a:satMod val="120000"/>
+                <a:shade val="78000"/>
+              </a:schemeClr>
+            </a:gs>
+          </a:gsLst>
+          <a:lin ang="5400000" scaled="0"/>
+        </a:gradFill>
+      </a:fillStyleLst>
+      <a:lnStyleLst>
+        <a:ln w="6350" cap="flat" cmpd="sng" algn="ctr">
+          <a:solidFill>
+            <a:schemeClr val="phClr"/>
+          </a:solidFill>
+          <a:prstDash val="solid"/>
+          <a:miter lim="800000"/>
+        </a:ln>
+        <a:ln w="12700" cap="flat" cmpd="sng" algn="ctr">
+          <a:solidFill>
+            <a:schemeClr val="phClr"/>
+          </a:solidFill>
+          <a:prstDash val="solid"/>
+          <a:miter lim="800000"/>
+        </a:ln>
+        <a:ln w="19050" cap="flat" cmpd="sng" algn="ctr">
+          <a:solidFill>
+            <a:schemeClr val="phClr"/>
+          </a:solidFill>
+          <a:prstDash val="solid"/>
+          <a:miter lim="800000"/>
+        </a:ln>
+      </a:lnStyleLst>
+      <a:effectStyleLst>
+        <a:effectStyle>
+          <a:effectLst/>
+        </a:effectStyle>
+        <a:effectStyle>
+          <a:effectLst/>
+        </a:effectStyle>
+        <a:effectStyle>
+          <a:effectLst>
+            <a:outerShdw blurRad="57150" dist="19050" dir="5400000" algn="ctr" rotWithShape="0">
+              <a:srgbClr val="000000">
+                <a:alpha val="63000"/>
+              </a:srgbClr>
+            </a:outerShdw>
+          </a:effectLst>
+        </a:effectStyle>
+      </a:effectStyleLst>
+      <a:bgFillStyleLst>
+        <a:solidFill>
+          <a:schemeClr val="phClr"/>
+        </a:solidFill>
+        <a:solidFill>
+          <a:schemeClr val="phClr">
+            <a:tint val="95000"/>
+            <a:satMod val="170000"/>
+          </a:schemeClr>
+        </a:solidFill>
+        <a:gradFill rotWithShape="1">
+          <a:gsLst>
+            <a:gs pos="0">
+              <a:schemeClr val="phClr">
+                <a:tint val="93000"/>
+                <a:satMod val="150000"/>
+                <a:shade val="98000"/>
+                <a:lumMod val="102000"/>
+              </a:schemeClr>
+            </a:gs>
+            <a:gs pos="50000">
+              <a:schemeClr val="phClr">
+                <a:tint val="98000"/>
+                <a:satMod val="130000"/>
+                <a:shade val="90000"/>
+                <a:lumMod val="103000"/>
+              </a:schemeClr>
+            </a:gs>
+            <a:gs pos="100000">
+              <a:schemeClr val="phClr">
+                <a:shade val="63000"/>
+                <a:satMod val="120000"/>
+              </a:schemeClr>
+            </a:gs>
+          </a:gsLst>
+          <a:lin ang="5400000" scaled="0"/>
+        </a:gradFill>
+      </a:bgFillStyleLst>
+    </a:fmtScheme>
+  </a:themeElements>
+  <a:objectDefaults/>
+  <a:extraClrSchemeLst/>
+  <a:extLst>
+    <a:ext uri="{05A4C25C-085E-4340-85A3-A5531E510DB2}">
+      <thm15:themeFamily xmlns:thm15="http://schemas.microsoft.com/office/thememl/2012/main" name="Office Theme" id="{62F939B6-93AF-4DB8-9C6B-D6C7DFDC589F}" vid="{4A3C46E8-61CC-4603-A589-7422A47A8E4A}"/>
+    </a:ext>
+  </a:extLst>
+</a:theme>
 </file>